--- a/sayt/media/resources/2026/10/mehnat-muhofazasi-11-mavzu.pptx
+++ b/sayt/media/resources/2026/10/mehnat-muhofazasi-11-mavzu.pptx
@@ -8363,7 +8363,7 @@
                 </a:solidFill>
                 <a:latin typeface="Segoe UI"/>
               </a:rPr>
-              <a:t>— kompyuter ichki qismlari bilan ishlaganda statik</a:t>
+              <a:t>Kompyuter ichki qismlari bilan ishlaganda statik</a:t>
             </a:r>
             <a:br/>
             <a:r>
@@ -8543,7 +8543,7 @@
                 </a:solidFill>
                 <a:latin typeface="Segoe UI"/>
               </a:rPr>
-              <a:t>— bilak tayanchli sichqoncha gilamchasi,</a:t>
+              <a:t>Bilak tayanchli sichqoncha gilamchasi, vertikal</a:t>
             </a:r>
             <a:br/>
             <a:r>
@@ -8553,7 +8553,7 @@
                 </a:solidFill>
                 <a:latin typeface="Segoe UI"/>
               </a:rPr>
-              <a:t>vertikal sichqoncha, oyoq tagligi.</a:t>
+              <a:t>sichqoncha, oyoq tagligi.</a:t>
             </a:r>
           </a:p>
         </p:txBody>
@@ -8723,7 +8723,7 @@
                 </a:solidFill>
                 <a:latin typeface="Segoe UI"/>
               </a:rPr>
-              <a:t>— maket tayyorlashda pichoq, kesuvchi asbob</a:t>
+              <a:t>Maket tayyorlashda pichoq, kesuvchi asbob va</a:t>
             </a:r>
             <a:br/>
             <a:r>
@@ -8733,7 +8733,7 @@
                 </a:solidFill>
                 <a:latin typeface="Segoe UI"/>
               </a:rPr>
-              <a:t>va yelim bilan ishlaganda.</a:t>
+              <a:t>yelim bilan ishlaganda.</a:t>
             </a:r>
           </a:p>
         </p:txBody>
@@ -8903,7 +8903,7 @@
                 </a:solidFill>
                 <a:latin typeface="Segoe UI"/>
               </a:rPr>
-              <a:t>— aks ettirishga qarshi (antiblik) qoplamali ko‘zoynaklar</a:t>
+              <a:t>Aks ettirishga qarshi (antiblik) qoplamali ko‘zoynaklar</a:t>
             </a:r>
             <a:br/>
             <a:r>
@@ -9083,7 +9083,7 @@
                 </a:solidFill>
                 <a:latin typeface="Segoe UI"/>
               </a:rPr>
-              <a:t>— shovqinli printer, plotter va server</a:t>
+              <a:t>Shovqinli printer, plotter va server xonalarida</a:t>
             </a:r>
             <a:br/>
             <a:r>
@@ -9093,7 +9093,7 @@
                 </a:solidFill>
                 <a:latin typeface="Segoe UI"/>
               </a:rPr>
-              <a:t>xonalarida ishlaganda.</a:t>
+              <a:t>ishlaganda.</a:t>
             </a:r>
           </a:p>
         </p:txBody>
@@ -14942,7 +14942,7 @@
                 </a:solidFill>
                 <a:latin typeface="Georgia"/>
               </a:rPr>
-              <a:t>Shaxsiy himoya vositalari (shhv) tushunchasi va tasnifi</a:t>
+              <a:t>Shaxsiy himoya vositalari (SHHV) tushunchasi va tasnifi</a:t>
             </a:r>
           </a:p>
         </p:txBody>
@@ -15156,7 +15156,7 @@
                 </a:solidFill>
                 <a:latin typeface="Georgia"/>
               </a:rPr>
-              <a:t>Kompyuter va aqliy mehnatda qo‘llaniladigan shhv</a:t>
+              <a:t>Kompyuter va aqliy mehnatda qo‘llaniladigan SHHV</a:t>
             </a:r>
           </a:p>
         </p:txBody>
@@ -15370,7 +15370,7 @@
                 </a:solidFill>
                 <a:latin typeface="Georgia"/>
               </a:rPr>
-              <a:t>Ish turiga mos shhv tanlash mezonlari</a:t>
+              <a:t>Ish turiga mos SHHV tanlash mezonlari</a:t>
             </a:r>
           </a:p>
         </p:txBody>
